--- a/Foundation_F2/Workshop/F2-W03_Apply_Workshop_L05-L06_A_Polite_Day_in_a_New_Class.pptx
+++ b/Foundation_F2/Workshop/F2-W03_Apply_Workshop_L05-L06_A_Polite_Day_in_a_New_Class.pptx
@@ -7440,7 +7440,7 @@
                 <a:latin typeface="Calibri" pitchFamily="34" charset="0"/>
                 <a:cs typeface="Amiri" pitchFamily="2" charset="-78"/>
               </a:rPr>
-              <a:t>Odd numbers come from F2-L05, even numbers from F2-L06. Core: a full sentence from the starter. Develop: add the “more” part. Stretch: link two answers with </a:t>
+              <a:t>Odd numbers come from F2-L05, even numbers from F2-L06. Core: a full sentence from the starter. Develop: add the “more” part. Stretch: link two answers with ‏</a:t>
             </a:r>
             <a:pPr algn="l" indent="0" marL="0">
               <a:buNone/>
@@ -7467,7 +7467,7 @@
                 <a:latin typeface="Calibri" pitchFamily="34" charset="0"/>
                 <a:cs typeface="Amiri" pitchFamily="2" charset="-78"/>
               </a:rPr>
-              <a:t>, </a:t>
+              <a:t>‏, ‏</a:t>
             </a:r>
             <a:pPr algn="l" indent="0" marL="0">
               <a:buNone/>
@@ -7494,7 +7494,7 @@
                 <a:latin typeface="Calibri" pitchFamily="34" charset="0"/>
                 <a:cs typeface="Amiri" pitchFamily="2" charset="-78"/>
               </a:rPr>
-              <a:t> or </a:t>
+              <a:t>‏ or ‏</a:t>
             </a:r>
             <a:pPr algn="l" indent="0" marL="0">
               <a:buNone/>
@@ -7521,7 +7521,7 @@
                 <a:latin typeface="Calibri" pitchFamily="34" charset="0"/>
                 <a:cs typeface="Amiri" pitchFamily="2" charset="-78"/>
               </a:rPr>
-              <a:t>. Swap after each question.</a:t>
+              <a:t>‏. Swap after each question.</a:t>
             </a:r>
             <a:endParaRPr lang="en-US" sz="1100" dirty="0"/>
           </a:p>
@@ -10844,7 +10844,7 @@
                 <a:latin typeface="Calibri" pitchFamily="34" charset="0"/>
                 <a:cs typeface="Amiri" pitchFamily="2" charset="-78"/>
               </a:rPr>
-              <a:t>Two adjectives for each person, with </a:t>
+              <a:t>Two adjectives for each person, with ‏</a:t>
             </a:r>
             <a:pPr algn="l" indent="0" marL="0">
               <a:buNone/>
@@ -10871,7 +10871,7 @@
                 <a:latin typeface="Calibri" pitchFamily="34" charset="0"/>
                 <a:cs typeface="Amiri" pitchFamily="2" charset="-78"/>
               </a:rPr>
-              <a:t>: </a:t>
+              <a:t>‏: ‏</a:t>
             </a:r>
             <a:pPr algn="l" indent="0" marL="0">
               <a:buNone/>
@@ -10898,7 +10898,7 @@
                 <a:latin typeface="Calibri" pitchFamily="34" charset="0"/>
                 <a:cs typeface="Amiri" pitchFamily="2" charset="-78"/>
               </a:rPr>
-              <a:t>.</a:t>
+              <a:t>‏.</a:t>
             </a:r>
             <a:endParaRPr lang="en-US" sz="1150" dirty="0"/>
           </a:p>
@@ -11035,7 +11035,7 @@
                 <a:latin typeface="Calibri" pitchFamily="34" charset="0"/>
                 <a:cs typeface="Amiri" pitchFamily="2" charset="-78"/>
               </a:rPr>
-              <a:t>Add a polite phrase and a reason: </a:t>
+              <a:t>Add a polite phrase and a reason: ‏</a:t>
             </a:r>
             <a:pPr algn="l" indent="0" marL="0">
               <a:buNone/>
@@ -11062,7 +11062,7 @@
                 <a:latin typeface="Calibri" pitchFamily="34" charset="0"/>
                 <a:cs typeface="Amiri" pitchFamily="2" charset="-78"/>
               </a:rPr>
-              <a:t> «</a:t>
+              <a:t>‏ «‏</a:t>
             </a:r>
             <a:pPr algn="l" indent="0" marL="0">
               <a:buNone/>
@@ -11089,7 +11089,7 @@
                 <a:latin typeface="Calibri" pitchFamily="34" charset="0"/>
                 <a:cs typeface="Amiri" pitchFamily="2" charset="-78"/>
               </a:rPr>
-              <a:t>» </a:t>
+              <a:t>‏» ‏</a:t>
             </a:r>
             <a:pPr algn="l" indent="0" marL="0">
               <a:buNone/>
@@ -11116,7 +11116,7 @@
                 <a:latin typeface="Calibri" pitchFamily="34" charset="0"/>
                 <a:cs typeface="Amiri" pitchFamily="2" charset="-78"/>
               </a:rPr>
-              <a:t> …</a:t>
+              <a:t> …‏</a:t>
             </a:r>
             <a:endParaRPr lang="en-US" sz="1150" dirty="0"/>
           </a:p>
@@ -17477,7 +17477,7 @@
                 <a:latin typeface="Calibri" pitchFamily="34" charset="0"/>
                 <a:cs typeface="Amiri" pitchFamily="2" charset="-78"/>
               </a:rPr>
-              <a:t>A feminine noun → feminine adjective with </a:t>
+              <a:t>A feminine noun → feminine adjective with ‏</a:t>
             </a:r>
             <a:pPr algn="l" indent="0" marL="0">
               <a:buNone/>
@@ -17504,7 +17504,7 @@
                 <a:latin typeface="Calibri" pitchFamily="34" charset="0"/>
                 <a:cs typeface="Amiri" pitchFamily="2" charset="-78"/>
               </a:rPr>
-              <a:t>.</a:t>
+              <a:t>‏.</a:t>
             </a:r>
             <a:endParaRPr lang="en-US" sz="1150" dirty="0"/>
           </a:p>
@@ -17715,7 +17715,7 @@
                 <a:latin typeface="Calibri" pitchFamily="34" charset="0"/>
                 <a:cs typeface="Amiri" pitchFamily="2" charset="-78"/>
               </a:rPr>
-              <a:t>The reply to </a:t>
+              <a:t>The reply to ‏</a:t>
             </a:r>
             <a:pPr algn="l" indent="0" marL="0">
               <a:buNone/>
@@ -17742,7 +17742,7 @@
                 <a:latin typeface="Calibri" pitchFamily="34" charset="0"/>
                 <a:cs typeface="Amiri" pitchFamily="2" charset="-78"/>
               </a:rPr>
-              <a:t> is </a:t>
+              <a:t>‏ is ‏</a:t>
             </a:r>
             <a:pPr algn="l" indent="0" marL="0">
               <a:buNone/>
@@ -17769,7 +17769,7 @@
                 <a:latin typeface="Calibri" pitchFamily="34" charset="0"/>
                 <a:cs typeface="Amiri" pitchFamily="2" charset="-78"/>
               </a:rPr>
-              <a:t>.</a:t>
+              <a:t>‏.</a:t>
             </a:r>
             <a:endParaRPr lang="en-US" sz="1150" dirty="0"/>
           </a:p>
@@ -17973,6 +17973,19 @@
               <a:buNone/>
             </a:pPr>
             <a:r>
+              <a:rPr lang="en-US" sz="1150" b="1" dirty="0">
+                <a:solidFill>
+                  <a:srgbClr val="1B3B6F"/>
+                </a:solidFill>
+                <a:latin typeface="Calibri" pitchFamily="34" charset="0"/>
+                <a:cs typeface="Amiri" pitchFamily="2" charset="-78"/>
+              </a:rPr>
+              <a:t>‏</a:t>
+            </a:r>
+            <a:pPr algn="l" indent="0" marL="0">
+              <a:buNone/>
+            </a:pPr>
+            <a:r>
               <a:rPr lang="ar-SA" altLang="en-US" sz="1500" b="1" dirty="0">
                 <a:solidFill>
                   <a:srgbClr val="1B3B6F"/>
@@ -17994,7 +18007,7 @@
                 <a:latin typeface="Calibri" pitchFamily="34" charset="0"/>
                 <a:cs typeface="Amiri" pitchFamily="2" charset="-78"/>
               </a:rPr>
-              <a:t> is feminine → </a:t>
+              <a:t>‏ is feminine → ‏</a:t>
             </a:r>
             <a:pPr algn="l" indent="0" marL="0">
               <a:buNone/>
@@ -18021,7 +18034,7 @@
                 <a:latin typeface="Calibri" pitchFamily="34" charset="0"/>
                 <a:cs typeface="Amiri" pitchFamily="2" charset="-78"/>
               </a:rPr>
-              <a:t>.</a:t>
+              <a:t>‏.</a:t>
             </a:r>
             <a:endParaRPr lang="en-US" sz="1150" dirty="0"/>
           </a:p>
@@ -19992,7 +20005,7 @@
                 <a:latin typeface="Calibri" pitchFamily="34" charset="0"/>
                 <a:cs typeface="Amiri" pitchFamily="2" charset="-78"/>
               </a:rPr>
-              <a:t>Write a polite message (about 40–60 words) to your new teacher. Include: • a polite greeting • say sorry (you forgot your book / you were late) • a polite request (</a:t>
+              <a:t>Write a polite message (about 40–60 words) to your new teacher. Include: • a polite greeting • say sorry (you forgot your book / you were late) • a polite request (‏</a:t>
             </a:r>
             <a:pPr algn="l" indent="0" marL="0">
               <a:buNone/>
@@ -20019,7 +20032,7 @@
                 <a:latin typeface="Calibri" pitchFamily="34" charset="0"/>
                 <a:cs typeface="Amiri" pitchFamily="2" charset="-78"/>
               </a:rPr>
-              <a:t>) • describe two classmates, a boy and a girl, with two adjectives each • a thank-you and a goodbye.</a:t>
+              <a:t>‏) • describe two classmates, a boy and a girl, with two adjectives each • a thank-you and a goodbye.</a:t>
             </a:r>
             <a:endParaRPr lang="en-US" sz="1150" dirty="0"/>
           </a:p>
@@ -20171,7 +20184,7 @@
                 <a:latin typeface="Calibri" pitchFamily="34" charset="0"/>
                 <a:cs typeface="Amiri" pitchFamily="2" charset="-78"/>
               </a:rPr>
-              <a:t>☐  At least one </a:t>
+              <a:t>☐  At least one ‏</a:t>
             </a:r>
             <a:pPr algn="l" indent="0" marL="0">
               <a:buNone/>
@@ -20198,7 +20211,7 @@
                 <a:latin typeface="Calibri" pitchFamily="34" charset="0"/>
                 <a:cs typeface="Amiri" pitchFamily="2" charset="-78"/>
               </a:rPr>
-              <a:t> and one </a:t>
+              <a:t>‏ and one ‏</a:t>
             </a:r>
             <a:pPr algn="l" indent="0" marL="0">
               <a:buNone/>
@@ -20225,7 +20238,7 @@
                 <a:latin typeface="Calibri" pitchFamily="34" charset="0"/>
                 <a:cs typeface="Amiri" pitchFamily="2" charset="-78"/>
               </a:rPr>
-              <a:t> (Develop).</a:t>
+              <a:t>‏ (Develop).</a:t>
             </a:r>
             <a:endParaRPr lang="en-US" sz="1200" dirty="0"/>
           </a:p>
@@ -23549,7 +23562,7 @@
                 <a:latin typeface="Calibri" pitchFamily="34" charset="0"/>
                 <a:cs typeface="Amiri" pitchFamily="2" charset="-78"/>
               </a:rPr>
-              <a:t>use </a:t>
+              <a:t>use ‏</a:t>
             </a:r>
             <a:pPr algn="l" indent="0" marL="0">
               <a:buNone/>
@@ -23576,7 +23589,7 @@
                 <a:latin typeface="Calibri" pitchFamily="34" charset="0"/>
                 <a:cs typeface="Amiri" pitchFamily="2" charset="-78"/>
               </a:rPr>
-              <a:t> for a boy and </a:t>
+              <a:t>‏ for a boy and ‏</a:t>
             </a:r>
             <a:pPr algn="l" indent="0" marL="0">
               <a:buNone/>
@@ -23603,7 +23616,7 @@
                 <a:latin typeface="Calibri" pitchFamily="34" charset="0"/>
                 <a:cs typeface="Amiri" pitchFamily="2" charset="-78"/>
               </a:rPr>
-              <a:t> for a girl?</a:t>
+              <a:t>‏ for a girl?</a:t>
             </a:r>
             <a:endParaRPr lang="en-US" sz="1100" dirty="0"/>
           </a:p>
@@ -23827,7 +23840,7 @@
                 <a:latin typeface="Calibri" pitchFamily="34" charset="0"/>
                 <a:cs typeface="Amiri" pitchFamily="2" charset="-78"/>
               </a:rPr>
-              <a:t>choose the boy / girl form correctly (-ka / -ki · </a:t>
+              <a:t>choose the boy / girl form correctly (-ka / -ki · ‏</a:t>
             </a:r>
             <a:pPr algn="l" indent="0" marL="0">
               <a:buNone/>
@@ -23854,7 +23867,7 @@
                 <a:latin typeface="Calibri" pitchFamily="34" charset="0"/>
                 <a:cs typeface="Amiri" pitchFamily="2" charset="-78"/>
               </a:rPr>
-              <a:t>)?</a:t>
+              <a:t>‏)?</a:t>
             </a:r>
             <a:endParaRPr lang="en-US" sz="1100" dirty="0"/>
           </a:p>
@@ -24013,7 +24026,7 @@
                 <a:latin typeface="Calibri" pitchFamily="34" charset="0"/>
                 <a:cs typeface="Amiri" pitchFamily="2" charset="-78"/>
               </a:rPr>
-              <a:t>use linking words (</a:t>
+              <a:t>use linking words (‏</a:t>
             </a:r>
             <a:pPr algn="l" indent="0" marL="0">
               <a:buNone/>
@@ -24121,7 +24134,7 @@
                 <a:latin typeface="Calibri" pitchFamily="34" charset="0"/>
                 <a:cs typeface="Amiri" pitchFamily="2" charset="-78"/>
               </a:rPr>
-              <a:t>)?</a:t>
+              <a:t>‏)?</a:t>
             </a:r>
             <a:endParaRPr lang="en-US" sz="1100" dirty="0"/>
           </a:p>
@@ -28067,7 +28080,7 @@
                 <a:latin typeface="Calibri" pitchFamily="34" charset="0"/>
                 <a:cs typeface="Amiri" pitchFamily="2" charset="-78"/>
               </a:rPr>
-              <a:t>I added reasons (</a:t>
+              <a:t>I added reasons (‏</a:t>
             </a:r>
             <a:pPr algn="l" indent="0" marL="0">
               <a:buNone/>
@@ -28094,7 +28107,7 @@
                 <a:latin typeface="Calibri" pitchFamily="34" charset="0"/>
                 <a:cs typeface="Amiri" pitchFamily="2" charset="-78"/>
               </a:rPr>
-              <a:t>) and extra details without frames.</a:t>
+              <a:t>‏) and extra details without frames.</a:t>
             </a:r>
             <a:endParaRPr lang="en-US" sz="1300" dirty="0"/>
           </a:p>
@@ -32222,7 +32235,7 @@
                 <a:latin typeface="Calibri" pitchFamily="34" charset="0"/>
                 <a:cs typeface="Amiri" pitchFamily="2" charset="-78"/>
               </a:rPr>
-              <a:t>☐  Add a reason (</a:t>
+              <a:t>☐  Add a reason (‏</a:t>
             </a:r>
             <a:pPr algn="l" indent="0" marL="0">
               <a:buNone/>
@@ -32249,7 +32262,7 @@
                 <a:latin typeface="Calibri" pitchFamily="34" charset="0"/>
                 <a:cs typeface="Amiri" pitchFamily="2" charset="-78"/>
               </a:rPr>
-              <a:t>) and an extra detail to every point.</a:t>
+              <a:t>‏) and an extra detail to every point.</a:t>
             </a:r>
             <a:endParaRPr lang="en-US" sz="1300" dirty="0"/>
           </a:p>
@@ -33770,7 +33783,7 @@
                 <a:latin typeface="Calibri" pitchFamily="34" charset="0"/>
                 <a:cs typeface="Amiri" pitchFamily="2" charset="-78"/>
               </a:rPr>
-              <a:t>Join a word from each lesson in one sentence with </a:t>
+              <a:t>Join a word from each lesson in one sentence with ‏</a:t>
             </a:r>
             <a:pPr algn="l" indent="0" marL="0">
               <a:buNone/>
@@ -33797,7 +33810,7 @@
                 <a:latin typeface="Calibri" pitchFamily="34" charset="0"/>
                 <a:cs typeface="Amiri" pitchFamily="2" charset="-78"/>
               </a:rPr>
-              <a:t> or </a:t>
+              <a:t>‏ or ‏</a:t>
             </a:r>
             <a:pPr algn="l" indent="0" marL="0">
               <a:buNone/>
@@ -33824,7 +33837,7 @@
                 <a:latin typeface="Calibri" pitchFamily="34" charset="0"/>
                 <a:cs typeface="Amiri" pitchFamily="2" charset="-78"/>
               </a:rPr>
-              <a:t>.</a:t>
+              <a:t>‏.</a:t>
             </a:r>
             <a:endParaRPr lang="en-US" sz="1150" dirty="0"/>
           </a:p>
@@ -37703,6 +37716,19 @@
               <a:buNone/>
             </a:pPr>
             <a:r>
+              <a:rPr lang="en-US" sz="1000" i="1" dirty="0">
+                <a:solidFill>
+                  <a:srgbClr val="8A6D1E"/>
+                </a:solidFill>
+                <a:latin typeface="Calibri" pitchFamily="34" charset="0"/>
+                <a:cs typeface="Amiri" pitchFamily="2" charset="-78"/>
+              </a:rPr>
+              <a:t>‏</a:t>
+            </a:r>
+            <a:pPr algn="l" indent="0" marL="0">
+              <a:buNone/>
+            </a:pPr>
+            <a:r>
               <a:rPr lang="ar-SA" altLang="en-US" sz="1300" dirty="0">
                 <a:solidFill>
                   <a:srgbClr val="8A6D1E"/>
@@ -37724,7 +37750,7 @@
                 <a:latin typeface="Calibri" pitchFamily="34" charset="0"/>
                 <a:cs typeface="Amiri" pitchFamily="2" charset="-78"/>
               </a:rPr>
-              <a:t> strengthens the thanks.</a:t>
+              <a:t>‏ strengthens the thanks.</a:t>
             </a:r>
             <a:endParaRPr lang="en-US" sz="1000" dirty="0"/>
           </a:p>
@@ -38075,6 +38101,19 @@
               <a:buNone/>
             </a:pPr>
             <a:r>
+              <a:rPr lang="en-US" sz="1000" i="1" dirty="0">
+                <a:solidFill>
+                  <a:srgbClr val="8A6D1E"/>
+                </a:solidFill>
+                <a:latin typeface="Calibri" pitchFamily="34" charset="0"/>
+                <a:cs typeface="Amiri" pitchFamily="2" charset="-78"/>
+              </a:rPr>
+              <a:t>‏</a:t>
+            </a:r>
+            <a:pPr algn="l" indent="0" marL="0">
+              <a:buNone/>
+            </a:pPr>
+            <a:r>
               <a:rPr lang="ar-SA" altLang="en-US" sz="1300" dirty="0">
                 <a:solidFill>
                   <a:srgbClr val="8A6D1E"/>
@@ -38096,7 +38135,7 @@
                 <a:latin typeface="Calibri" pitchFamily="34" charset="0"/>
                 <a:cs typeface="Amiri" pitchFamily="2" charset="-78"/>
               </a:rPr>
-              <a:t> also makes “not”: </a:t>
+              <a:t>‏ also makes “not”: ‏</a:t>
             </a:r>
             <a:pPr algn="l" indent="0" marL="0">
               <a:buNone/>
@@ -38123,7 +38162,7 @@
                 <a:latin typeface="Calibri" pitchFamily="34" charset="0"/>
                 <a:cs typeface="Amiri" pitchFamily="2" charset="-78"/>
               </a:rPr>
-              <a:t>.</a:t>
+              <a:t>‏.</a:t>
             </a:r>
             <a:endParaRPr lang="en-US" sz="1000" dirty="0"/>
           </a:p>
@@ -39471,7 +39510,7 @@
                 <a:latin typeface="Calibri" pitchFamily="34" charset="0"/>
                 <a:cs typeface="Amiri" pitchFamily="2" charset="-78"/>
               </a:rPr>
-              <a:t>F2-L04 verb + </a:t>
+              <a:t>F2-L04 verb + ‏</a:t>
             </a:r>
             <a:pPr algn="l" indent="0" marL="0">
               <a:buNone/>
@@ -39498,7 +39537,7 @@
                 <a:latin typeface="Calibri" pitchFamily="34" charset="0"/>
                 <a:cs typeface="Amiri" pitchFamily="2" charset="-78"/>
               </a:rPr>
-              <a:t>.</a:t>
+              <a:t>‏.</a:t>
             </a:r>
             <a:endParaRPr lang="en-US" sz="1000" dirty="0"/>
           </a:p>
